--- a/curso/pptx/S73.pptx
+++ b/curso/pptx/S73.pptx
@@ -6819,7 +6819,7 @@
                 </a:solidFill>
                 <a:latin typeface="Nunito Sans"/>
               </a:rPr>
-              <a:t>Responde a la pregunta: </a:t>
+              <a:t>它回答的问题是：</a:t>
             </a:r>
             <a:r>
               <a:rPr sz="2800" b="1">
@@ -6828,7 +6828,7 @@
                 </a:solidFill>
                 <a:latin typeface="Nunito Sans"/>
               </a:rPr>
-              <a:t>¿quién soy yo?</a:t>
+              <a:t>我是谁？</a:t>
             </a:r>
           </a:p>
           <a:p>
@@ -6853,7 +6853,7 @@
                 </a:solidFill>
                 <a:latin typeface="Nunito Sans"/>
               </a:rPr>
-              <a:t>Nadie tiene exactamente la misma</a:t>
+              <a:t>没有人的身份认同和另一个人完全一样</a:t>
             </a:r>
           </a:p>
         </p:txBody>
@@ -7087,7 +7087,7 @@
                 </a:solidFill>
                 <a:latin typeface="Nunito Sans"/>
               </a:rPr>
-              <a:t>Responde a la pregunta: </a:t>
+              <a:t>它回答的问题是：</a:t>
             </a:r>
             <a:r>
               <a:rPr sz="2800" b="1">
@@ -7096,7 +7096,7 @@
                 </a:solidFill>
                 <a:latin typeface="Nunito Sans"/>
               </a:rPr>
-              <a:t>¿con quiénes soy «nosotros»?</a:t>
+              <a:t>我和谁是“我们”？</a:t>
             </a:r>
           </a:p>
           <a:p>
@@ -7121,7 +7121,7 @@
                 </a:solidFill>
                 <a:latin typeface="Nunito Sans"/>
               </a:rPr>
-              <a:t>Cuadrilla, equipo, lengua, barrio, origen, religión</a:t>
+              <a:t>朋友圈、球队、语言、街区、出身、宗教</a:t>
             </a:r>
           </a:p>
           <a:p>
@@ -7146,7 +7146,7 @@
                 </a:solidFill>
                 <a:latin typeface="Nunito Sans"/>
               </a:rPr>
-              <a:t>Como vimos en la 第64课: un grupo siente un «nosotros»</a:t>
+              <a:t>就像我们在第64课看到的：一个集体会有一种“我们”的感觉</a:t>
             </a:r>
           </a:p>
         </p:txBody>
@@ -7337,7 +7337,7 @@
                 </a:solidFill>
                 <a:latin typeface="Nunito Sans"/>
               </a:rPr>
-              <a:t>Cada persona tiene </a:t>
+              <a:t>每个人同时有</a:t>
             </a:r>
             <a:r>
               <a:rPr sz="2800" b="1">
@@ -7346,16 +7346,7 @@
                 </a:solidFill>
                 <a:latin typeface="Nunito Sans"/>
               </a:rPr>
-              <a:t>muchas pertenencias</a:t>
-            </a:r>
-            <a:r>
-              <a:rPr sz="2800" b="0">
-                <a:solidFill>
-                  <a:srgbClr val="1F2A44"/>
-                </a:solidFill>
-                <a:latin typeface="Nunito Sans"/>
-              </a:rPr>
-              <a:t> a la vez</a:t>
+              <a:t>很多归属</a:t>
             </a:r>
           </a:p>
           <a:p>
@@ -7380,7 +7371,7 @@
                 </a:solidFill>
                 <a:latin typeface="Nunito Sans"/>
               </a:rPr>
-              <a:t>Ninguna de ellas, sola, dice quién eres</a:t>
+              <a:t>其中任何一个单独都不能说明你是谁</a:t>
             </a:r>
           </a:p>
           <a:p>
@@ -7405,7 +7396,7 @@
                 </a:solidFill>
                 <a:latin typeface="Nunito Sans"/>
               </a:rPr>
-              <a:t>Reducir a alguien a </a:t>
+              <a:t>把一个人简化成</a:t>
             </a:r>
             <a:r>
               <a:rPr sz="2800" b="1">
@@ -7414,7 +7405,7 @@
                 </a:solidFill>
                 <a:latin typeface="Nunito Sans"/>
               </a:rPr>
-              <a:t>una sola</a:t>
+              <a:t>只有一个</a:t>
             </a:r>
             <a:r>
               <a:rPr sz="2800" b="0">
@@ -7423,7 +7414,7 @@
                 </a:solidFill>
                 <a:latin typeface="Nunito Sans"/>
               </a:rPr>
-              <a:t> puede llevar al </a:t>
+              <a:t>，可能导致</a:t>
             </a:r>
             <a:r>
               <a:rPr sz="2800" b="1">
@@ -7432,7 +7423,7 @@
                 </a:solidFill>
                 <a:latin typeface="Nunito Sans"/>
               </a:rPr>
-              <a:t>odio</a:t>
+              <a:t>仇恨</a:t>
             </a:r>
           </a:p>
         </p:txBody>

--- a/curso/pptx/S73.pptx
+++ b/curso/pptx/S73.pptx
@@ -4232,7 +4232,7 @@
                 </a:solidFill>
                 <a:latin typeface="Nunito Sans"/>
               </a:rPr>
-              <a:t>我们回到艾托尔：来自圣图奇区、毕尔巴鄂竞技的球迷、说巴斯克语的人、哥哥、玩PlayStation的人、有一位加利西亚外婆的孙子。（编造的例子。）</a:t>
+              <a:t>我们回到这个男孩：来自圣图奇区、毕尔巴鄂竞技的球迷、说巴斯克语的人、哥哥、玩PlayStation的人、有一位加利西亚外婆的孙子。（编造的例子。）</a:t>
             </a:r>
           </a:p>
         </p:txBody>
@@ -4330,7 +4330,7 @@
                 </a:solidFill>
                 <a:latin typeface="Nunito Sans"/>
               </a:rPr>
-              <a:t>它们并不互相竞争：艾托尔可以觉得自己是毕尔巴鄂人，同时也爱着加利西亚。</a:t>
+              <a:t>它们并不互相竞争：这个男孩可以觉得自己是毕尔巴鄂人，同时也爱着加利西亚。</a:t>
             </a:r>
           </a:p>
           <a:p>
@@ -4541,7 +4541,7 @@
                 </a:solidFill>
                 <a:latin typeface="Nunito Sans"/>
               </a:rPr>
-              <a:t>一场德比之后，在班级的WhatsApp群里，有人写到陈：“他是皇家社会的。千万别相信他。”</a:t>
+              <a:t>一场德比之后，在班级的WhatsApp群里，有人写到一个男孩：“他是皇家社会的。千万别相信他。”</a:t>
             </a:r>
           </a:p>
         </p:txBody>
@@ -4589,7 +4589,7 @@
                 </a:solidFill>
                 <a:latin typeface="Nunito Sans"/>
               </a:rPr>
-              <a:t>陈被简化成了</a:t>
+              <a:t>这个男孩被简化成了</a:t>
             </a:r>
             <a:r>
               <a:rPr sz="2400" b="1">
@@ -4657,7 +4657,7 @@
                 </a:solidFill>
                 <a:latin typeface="Nunito Sans"/>
               </a:rPr>
-              <a:t>这相关吗？是皇家社会的人，并不能说明陈是不是可靠。</a:t>
+              <a:t>这相关吗？是皇家社会的人，并不能说明这个男孩是不是可靠。</a:t>
             </a:r>
           </a:p>
           <a:p>
@@ -4868,7 +4868,7 @@
                 </a:solidFill>
                 <a:latin typeface="Nunito Sans"/>
               </a:rPr>
-              <a:t>学完第66课之后，玛亚伦想：“如果集体会造成‘我们和他们’，最好就不要觉得自己属于任何一个。”</a:t>
+              <a:t>学完第66课之后，一个女孩想：“如果集体会造成‘我们和他们’，最好就不要觉得自己属于任何一个。”</a:t>
             </a:r>
           </a:p>
         </p:txBody>
@@ -6442,7 +6442,7 @@
                 </a:solidFill>
                 <a:latin typeface="Nunito Sans"/>
               </a:rPr>
-              <a:t>艾托尔来自圣图奇区，是毕尔巴鄂竞技的球迷，会说巴斯克语，是哥哥，玩PlayStation，他的外婆是加利西亚人。</a:t>
+              <a:t>一个男孩来自圣图奇区，是毕尔巴鄂竞技的球迷，会说巴斯克语，是哥哥，玩PlayStation，他的外婆是加利西亚人。</a:t>
             </a:r>
           </a:p>
         </p:txBody>
@@ -6481,7 +6481,7 @@
                 </a:solidFill>
                 <a:latin typeface="Nunito Sans"/>
               </a:rPr>
-              <a:t>这些东西里，哪一个是“真正的艾托尔”？</a:t>
+              <a:t>这些东西里，哪一个是“真正的他”？</a:t>
             </a:r>
           </a:p>
         </p:txBody>
